--- a/Upgrading Java.pptx
+++ b/Upgrading Java.pptx
@@ -5,7 +5,7 @@
     <p:sldMasterId id="2147483696" r:id="rId1"/>
   </p:sldMasterIdLst>
   <p:notesMasterIdLst>
-    <p:notesMasterId r:id="rId23"/>
+    <p:notesMasterId r:id="rId26"/>
   </p:notesMasterIdLst>
   <p:sldIdLst>
     <p:sldId id="256" r:id="rId2"/>
@@ -17,18 +17,21 @@
     <p:sldId id="284" r:id="rId8"/>
     <p:sldId id="258" r:id="rId9"/>
     <p:sldId id="293" r:id="rId10"/>
-    <p:sldId id="281" r:id="rId11"/>
-    <p:sldId id="259" r:id="rId12"/>
-    <p:sldId id="282" r:id="rId13"/>
-    <p:sldId id="260" r:id="rId14"/>
-    <p:sldId id="265" r:id="rId15"/>
-    <p:sldId id="278" r:id="rId16"/>
-    <p:sldId id="291" r:id="rId17"/>
-    <p:sldId id="277" r:id="rId18"/>
-    <p:sldId id="285" r:id="rId19"/>
-    <p:sldId id="274" r:id="rId20"/>
-    <p:sldId id="276" r:id="rId21"/>
-    <p:sldId id="292" r:id="rId22"/>
+    <p:sldId id="294" r:id="rId11"/>
+    <p:sldId id="295" r:id="rId12"/>
+    <p:sldId id="281" r:id="rId13"/>
+    <p:sldId id="282" r:id="rId14"/>
+    <p:sldId id="296" r:id="rId15"/>
+    <p:sldId id="260" r:id="rId16"/>
+    <p:sldId id="265" r:id="rId17"/>
+    <p:sldId id="278" r:id="rId18"/>
+    <p:sldId id="291" r:id="rId19"/>
+    <p:sldId id="277" r:id="rId20"/>
+    <p:sldId id="285" r:id="rId21"/>
+    <p:sldId id="274" r:id="rId22"/>
+    <p:sldId id="276" r:id="rId23"/>
+    <p:sldId id="292" r:id="rId24"/>
+    <p:sldId id="297" r:id="rId25"/>
   </p:sldIdLst>
   <p:sldSz cx="12192000" cy="6858000"/>
   <p:notesSz cx="6858000" cy="9144000"/>
@@ -225,7 +228,7 @@
           <a:p>
             <a:fld id="{C8A995BC-7D57-4B17-BE90-5944E672AF66}" type="datetimeFigureOut">
               <a:rPr lang="en-US" smtClean="0"/>
-              <a:t>4/29/2025</a:t>
+              <a:t>4/30/2025</a:t>
             </a:fld>
             <a:endParaRPr lang="en-US"/>
           </a:p>
@@ -698,91 +701,7 @@
           <a:p>
             <a:fld id="{8356EF1E-2890-4018-841A-495E748CCBCC}" type="slidenum">
               <a:rPr lang="en-US" smtClean="0"/>
-              <a:t>19</a:t>
-            </a:fld>
-            <a:endParaRPr lang="en-US"/>
-          </a:p>
-        </p:txBody>
-      </p:sp>
-    </p:spTree>
-    <p:extLst>
-      <p:ext uri="{BB962C8B-B14F-4D97-AF65-F5344CB8AC3E}">
-        <p14:creationId xmlns:p14="http://schemas.microsoft.com/office/powerpoint/2010/main" val="3532160582"/>
-      </p:ext>
-    </p:extLst>
-  </p:cSld>
-  <p:clrMapOvr>
-    <a:masterClrMapping/>
-  </p:clrMapOvr>
-</p:notes>
-</file>
-
-<file path=ppt/notesSlides/notesSlide11.xml><?xml version="1.0" encoding="utf-8"?>
-<p:notes xmlns:a="http://schemas.openxmlformats.org/drawingml/2006/main" xmlns:r="http://schemas.openxmlformats.org/officeDocument/2006/relationships" xmlns:p="http://schemas.openxmlformats.org/presentationml/2006/main">
-  <p:cSld>
-    <p:spTree>
-      <p:nvGrpSpPr>
-        <p:cNvPr id="1" name=""/>
-        <p:cNvGrpSpPr/>
-        <p:nvPr/>
-      </p:nvGrpSpPr>
-      <p:grpSpPr>
-        <a:xfrm>
-          <a:off x="0" y="0"/>
-          <a:ext cx="0" cy="0"/>
-          <a:chOff x="0" y="0"/>
-          <a:chExt cx="0" cy="0"/>
-        </a:xfrm>
-      </p:grpSpPr>
-      <p:sp>
-        <p:nvSpPr>
-          <p:cNvPr id="2" name="Slide Image Placeholder 1"/>
-          <p:cNvSpPr>
-            <a:spLocks noGrp="1" noRot="1" noChangeAspect="1"/>
-          </p:cNvSpPr>
-          <p:nvPr>
-            <p:ph type="sldImg"/>
-          </p:nvPr>
-        </p:nvSpPr>
-        <p:spPr/>
-      </p:sp>
-      <p:sp>
-        <p:nvSpPr>
-          <p:cNvPr id="3" name="Notes Placeholder 2"/>
-          <p:cNvSpPr>
-            <a:spLocks noGrp="1"/>
-          </p:cNvSpPr>
-          <p:nvPr>
-            <p:ph type="body" idx="1"/>
-          </p:nvPr>
-        </p:nvSpPr>
-        <p:spPr/>
-        <p:txBody>
-          <a:bodyPr/>
-          <a:lstStyle/>
-          <a:p>
-            <a:endParaRPr lang="en-US" dirty="0"/>
-          </a:p>
-        </p:txBody>
-      </p:sp>
-      <p:sp>
-        <p:nvSpPr>
-          <p:cNvPr id="4" name="Slide Number Placeholder 3"/>
-          <p:cNvSpPr>
-            <a:spLocks noGrp="1"/>
-          </p:cNvSpPr>
-          <p:nvPr>
-            <p:ph type="sldNum" sz="quarter" idx="5"/>
-          </p:nvPr>
-        </p:nvSpPr>
-        <p:spPr/>
-        <p:txBody>
-          <a:bodyPr/>
-          <a:lstStyle/>
-          <a:p>
-            <a:fld id="{8356EF1E-2890-4018-841A-495E748CCBCC}" type="slidenum">
-              <a:rPr lang="en-US" smtClean="0"/>
-              <a:t>20</a:t>
+              <a:t>22</a:t>
             </a:fld>
             <a:endParaRPr lang="en-US"/>
           </a:p>
@@ -1487,7 +1406,7 @@
           <a:p>
             <a:fld id="{DB139429-98FD-46C3-8AB6-EAFBA76ECF14}" type="slidenum">
               <a:rPr lang="en-US" smtClean="0"/>
-              <a:t>10</a:t>
+              <a:t>12</a:t>
             </a:fld>
             <a:endParaRPr lang="en-US"/>
           </a:p>
@@ -1550,73 +1469,11 @@
           <a:bodyPr/>
           <a:lstStyle/>
           <a:p>
-            <a:pPr marL="0" indent="0">
-              <a:buNone/>
+            <a:pPr marL="285750" indent="-285750" algn="l">
+              <a:buFont typeface="Arial" panose="020B0604020202020204" pitchFamily="34" charset="0"/>
+              <a:buChar char="•"/>
             </a:pPr>
-            <a:r>
-              <a:rPr lang="en-US" dirty="0">
-                <a:latin typeface="JetBrains Mono"/>
-              </a:rPr>
-              <a:t>Start with the old way</a:t>
-            </a:r>
-          </a:p>
-          <a:p>
-            <a:pPr marL="0" indent="0">
-              <a:buNone/>
-            </a:pPr>
-            <a:r>
-              <a:rPr lang="en-US" dirty="0">
-                <a:latin typeface="JetBrains Mono"/>
-              </a:rPr>
-              <a:t>Ask AI to rewrite using text blocks4</a:t>
-            </a:r>
-          </a:p>
-          <a:p>
-            <a:pPr marL="0" indent="0">
-              <a:buNone/>
-            </a:pPr>
-            <a:r>
-              <a:rPr lang="en-US" dirty="0">
-                <a:latin typeface="JetBrains Mono"/>
-              </a:rPr>
-              <a:t>Add white space</a:t>
-            </a:r>
-          </a:p>
-          <a:p>
-            <a:pPr marL="0" indent="0">
-              <a:buNone/>
-            </a:pPr>
-            <a:r>
-              <a:rPr lang="en-US" dirty="0">
-                <a:latin typeface="JetBrains Mono"/>
-              </a:rPr>
-              <a:t>Show indents</a:t>
-            </a:r>
-          </a:p>
-          <a:p>
-            <a:pPr marL="0" indent="0">
-              <a:buNone/>
-            </a:pPr>
-            <a:r>
-              <a:rPr lang="en-US" dirty="0">
-                <a:latin typeface="JetBrains Mono"/>
-              </a:rPr>
-              <a:t>Move last line """  to be right of opening, then to left of opening</a:t>
-            </a:r>
-          </a:p>
-          <a:p>
-            <a:pPr marL="0" indent="0">
-              <a:buNone/>
-            </a:pPr>
-            <a:r>
-              <a:rPr lang="en-US" dirty="0">
-                <a:latin typeface="JetBrains Mono"/>
-              </a:rPr>
-              <a:t>Show how to escape literal instances of """ </a:t>
-            </a:r>
-          </a:p>
-          <a:p>
-            <a:endParaRPr lang="en-US" dirty="0"/>
+            <a:endParaRPr lang="en-US" sz="1400" dirty="0"/>
           </a:p>
         </p:txBody>
       </p:sp>
@@ -1635,9 +1492,9 @@
           <a:bodyPr/>
           <a:lstStyle/>
           <a:p>
-            <a:fld id="{DB139429-98FD-46C3-8AB6-EAFBA76ECF14}" type="slidenum">
+            <a:fld id="{8356EF1E-2890-4018-841A-495E748CCBCC}" type="slidenum">
               <a:rPr lang="en-US" smtClean="0"/>
-              <a:t>11</a:t>
+              <a:t>17</a:t>
             </a:fld>
             <a:endParaRPr lang="en-US"/>
           </a:p>
@@ -1646,7 +1503,7 @@
     </p:spTree>
     <p:extLst>
       <p:ext uri="{BB962C8B-B14F-4D97-AF65-F5344CB8AC3E}">
-        <p14:creationId xmlns:p14="http://schemas.microsoft.com/office/powerpoint/2010/main" val="1794954167"/>
+        <p14:creationId xmlns:p14="http://schemas.microsoft.com/office/powerpoint/2010/main" val="794418165"/>
       </p:ext>
     </p:extLst>
   </p:cSld>
@@ -1700,11 +1557,11 @@
           <a:bodyPr/>
           <a:lstStyle/>
           <a:p>
-            <a:pPr marL="285750" indent="-285750" algn="l">
+            <a:pPr marL="171450" indent="-171450">
               <a:buFont typeface="Arial" panose="020B0604020202020204" pitchFamily="34" charset="0"/>
               <a:buChar char="•"/>
             </a:pPr>
-            <a:endParaRPr lang="en-US" sz="1400" dirty="0"/>
+            <a:endParaRPr lang="en-US" dirty="0"/>
           </a:p>
         </p:txBody>
       </p:sp>
@@ -1725,7 +1582,7 @@
           <a:p>
             <a:fld id="{8356EF1E-2890-4018-841A-495E748CCBCC}" type="slidenum">
               <a:rPr lang="en-US" smtClean="0"/>
-              <a:t>15</a:t>
+              <a:t>19</a:t>
             </a:fld>
             <a:endParaRPr lang="en-US"/>
           </a:p>
@@ -1734,7 +1591,7 @@
     </p:spTree>
     <p:extLst>
       <p:ext uri="{BB962C8B-B14F-4D97-AF65-F5344CB8AC3E}">
-        <p14:creationId xmlns:p14="http://schemas.microsoft.com/office/powerpoint/2010/main" val="794418165"/>
+        <p14:creationId xmlns:p14="http://schemas.microsoft.com/office/powerpoint/2010/main" val="912020862"/>
       </p:ext>
     </p:extLst>
   </p:cSld>
@@ -1788,10 +1645,6 @@
           <a:bodyPr/>
           <a:lstStyle/>
           <a:p>
-            <a:pPr marL="171450" indent="-171450">
-              <a:buFont typeface="Arial" panose="020B0604020202020204" pitchFamily="34" charset="0"/>
-              <a:buChar char="•"/>
-            </a:pPr>
             <a:endParaRPr lang="en-US" dirty="0"/>
           </a:p>
         </p:txBody>
@@ -1813,7 +1666,7 @@
           <a:p>
             <a:fld id="{8356EF1E-2890-4018-841A-495E748CCBCC}" type="slidenum">
               <a:rPr lang="en-US" smtClean="0"/>
-              <a:t>17</a:t>
+              <a:t>21</a:t>
             </a:fld>
             <a:endParaRPr lang="en-US"/>
           </a:p>
@@ -1822,7 +1675,7 @@
     </p:spTree>
     <p:extLst>
       <p:ext uri="{BB962C8B-B14F-4D97-AF65-F5344CB8AC3E}">
-        <p14:creationId xmlns:p14="http://schemas.microsoft.com/office/powerpoint/2010/main" val="912020862"/>
+        <p14:creationId xmlns:p14="http://schemas.microsoft.com/office/powerpoint/2010/main" val="3532160582"/>
       </p:ext>
     </p:extLst>
   </p:cSld>
@@ -2002,7 +1855,7 @@
           <a:p>
             <a:fld id="{4DAF1BF7-3DF1-41E9-BE1F-5D1CC002943C}" type="datetimeFigureOut">
               <a:rPr lang="en-US" smtClean="0"/>
-              <a:t>4/29/2025</a:t>
+              <a:t>4/30/2025</a:t>
             </a:fld>
             <a:endParaRPr lang="en-US"/>
           </a:p>
@@ -2269,7 +2122,7 @@
           <a:p>
             <a:fld id="{4DAF1BF7-3DF1-41E9-BE1F-5D1CC002943C}" type="datetimeFigureOut">
               <a:rPr lang="en-US" smtClean="0"/>
-              <a:t>4/29/2025</a:t>
+              <a:t>4/30/2025</a:t>
             </a:fld>
             <a:endParaRPr lang="en-US"/>
           </a:p>
@@ -2500,7 +2353,7 @@
           <a:p>
             <a:fld id="{4DAF1BF7-3DF1-41E9-BE1F-5D1CC002943C}" type="datetimeFigureOut">
               <a:rPr lang="en-US" smtClean="0"/>
-              <a:t>4/29/2025</a:t>
+              <a:t>4/30/2025</a:t>
             </a:fld>
             <a:endParaRPr lang="en-US"/>
           </a:p>
@@ -2810,7 +2663,7 @@
           <a:p>
             <a:fld id="{4DAF1BF7-3DF1-41E9-BE1F-5D1CC002943C}" type="datetimeFigureOut">
               <a:rPr lang="en-US" smtClean="0"/>
-              <a:t>4/29/2025</a:t>
+              <a:t>4/30/2025</a:t>
             </a:fld>
             <a:endParaRPr lang="en-US"/>
           </a:p>
@@ -3283,7 +3136,7 @@
           <a:p>
             <a:fld id="{4DAF1BF7-3DF1-41E9-BE1F-5D1CC002943C}" type="datetimeFigureOut">
               <a:rPr lang="en-US" smtClean="0"/>
-              <a:t>4/29/2025</a:t>
+              <a:t>4/30/2025</a:t>
             </a:fld>
             <a:endParaRPr lang="en-US"/>
           </a:p>
@@ -3830,7 +3683,7 @@
           <a:p>
             <a:fld id="{4DAF1BF7-3DF1-41E9-BE1F-5D1CC002943C}" type="datetimeFigureOut">
               <a:rPr lang="en-US" smtClean="0"/>
-              <a:t>4/29/2025</a:t>
+              <a:t>4/30/2025</a:t>
             </a:fld>
             <a:endParaRPr lang="en-US"/>
           </a:p>
@@ -4604,7 +4457,7 @@
           <a:p>
             <a:fld id="{4DAF1BF7-3DF1-41E9-BE1F-5D1CC002943C}" type="datetimeFigureOut">
               <a:rPr lang="en-US" smtClean="0"/>
-              <a:t>4/29/2025</a:t>
+              <a:t>4/30/2025</a:t>
             </a:fld>
             <a:endParaRPr lang="en-US"/>
           </a:p>
@@ -4779,7 +4632,7 @@
           <a:p>
             <a:fld id="{4DAF1BF7-3DF1-41E9-BE1F-5D1CC002943C}" type="datetimeFigureOut">
               <a:rPr lang="en-US" smtClean="0"/>
-              <a:t>4/29/2025</a:t>
+              <a:t>4/30/2025</a:t>
             </a:fld>
             <a:endParaRPr lang="en-US"/>
           </a:p>
@@ -5002,7 +4855,7 @@
           <a:p>
             <a:fld id="{4DAF1BF7-3DF1-41E9-BE1F-5D1CC002943C}" type="datetimeFigureOut">
               <a:rPr lang="en-US" smtClean="0"/>
-              <a:t>4/29/2025</a:t>
+              <a:t>4/30/2025</a:t>
             </a:fld>
             <a:endParaRPr lang="en-US"/>
           </a:p>
@@ -5182,7 +5035,7 @@
           <a:p>
             <a:fld id="{4DAF1BF7-3DF1-41E9-BE1F-5D1CC002943C}" type="datetimeFigureOut">
               <a:rPr lang="en-US" smtClean="0"/>
-              <a:t>4/29/2025</a:t>
+              <a:t>4/30/2025</a:t>
             </a:fld>
             <a:endParaRPr lang="en-US"/>
           </a:p>
@@ -5471,7 +5324,7 @@
           <a:p>
             <a:fld id="{4DAF1BF7-3DF1-41E9-BE1F-5D1CC002943C}" type="datetimeFigureOut">
               <a:rPr lang="en-US" smtClean="0"/>
-              <a:t>4/29/2025</a:t>
+              <a:t>4/30/2025</a:t>
             </a:fld>
             <a:endParaRPr lang="en-US"/>
           </a:p>
@@ -5713,7 +5566,7 @@
           <a:p>
             <a:fld id="{4DAF1BF7-3DF1-41E9-BE1F-5D1CC002943C}" type="datetimeFigureOut">
               <a:rPr lang="en-US" smtClean="0"/>
-              <a:t>4/29/2025</a:t>
+              <a:t>4/30/2025</a:t>
             </a:fld>
             <a:endParaRPr lang="en-US"/>
           </a:p>
@@ -6092,7 +5945,7 @@
           <a:p>
             <a:fld id="{4DAF1BF7-3DF1-41E9-BE1F-5D1CC002943C}" type="datetimeFigureOut">
               <a:rPr lang="en-US" smtClean="0"/>
-              <a:t>4/29/2025</a:t>
+              <a:t>4/30/2025</a:t>
             </a:fld>
             <a:endParaRPr lang="en-US"/>
           </a:p>
@@ -6210,7 +6063,7 @@
           <a:p>
             <a:fld id="{4DAF1BF7-3DF1-41E9-BE1F-5D1CC002943C}" type="datetimeFigureOut">
               <a:rPr lang="en-US" smtClean="0"/>
-              <a:t>4/29/2025</a:t>
+              <a:t>4/30/2025</a:t>
             </a:fld>
             <a:endParaRPr lang="en-US"/>
           </a:p>
@@ -6305,7 +6158,7 @@
           <a:p>
             <a:fld id="{4DAF1BF7-3DF1-41E9-BE1F-5D1CC002943C}" type="datetimeFigureOut">
               <a:rPr lang="en-US" smtClean="0"/>
-              <a:t>4/29/2025</a:t>
+              <a:t>4/30/2025</a:t>
             </a:fld>
             <a:endParaRPr lang="en-US"/>
           </a:p>
@@ -6554,7 +6407,7 @@
           <a:p>
             <a:fld id="{4DAF1BF7-3DF1-41E9-BE1F-5D1CC002943C}" type="datetimeFigureOut">
               <a:rPr lang="en-US" smtClean="0"/>
-              <a:t>4/29/2025</a:t>
+              <a:t>4/30/2025</a:t>
             </a:fld>
             <a:endParaRPr lang="en-US"/>
           </a:p>
@@ -6811,7 +6664,7 @@
           <a:p>
             <a:fld id="{4DAF1BF7-3DF1-41E9-BE1F-5D1CC002943C}" type="datetimeFigureOut">
               <a:rPr lang="en-US" smtClean="0"/>
-              <a:t>4/29/2025</a:t>
+              <a:t>4/30/2025</a:t>
             </a:fld>
             <a:endParaRPr lang="en-US"/>
           </a:p>
@@ -7054,7 +6907,7 @@
           <a:p>
             <a:fld id="{4DAF1BF7-3DF1-41E9-BE1F-5D1CC002943C}" type="datetimeFigureOut">
               <a:rPr lang="en-US" smtClean="0"/>
-              <a:t>4/29/2025</a:t>
+              <a:t>4/30/2025</a:t>
             </a:fld>
             <a:endParaRPr lang="en-US"/>
           </a:p>
@@ -7558,6 +7411,192 @@
   <p:cSld>
     <p:spTree>
       <p:nvGrpSpPr>
+        <p:cNvPr id="1" name=""/>
+        <p:cNvGrpSpPr/>
+        <p:nvPr/>
+      </p:nvGrpSpPr>
+      <p:grpSpPr>
+        <a:xfrm>
+          <a:off x="0" y="0"/>
+          <a:ext cx="0" cy="0"/>
+          <a:chOff x="0" y="0"/>
+          <a:chExt cx="0" cy="0"/>
+        </a:xfrm>
+      </p:grpSpPr>
+      <p:sp>
+        <p:nvSpPr>
+          <p:cNvPr id="2" name="Title 1">
+            <a:extLst>
+              <a:ext uri="{FF2B5EF4-FFF2-40B4-BE49-F238E27FC236}">
+                <a16:creationId xmlns:a16="http://schemas.microsoft.com/office/drawing/2014/main" id="{6A106DA9-BC36-C936-988B-4E4ADE21B137}"/>
+              </a:ext>
+            </a:extLst>
+          </p:cNvPr>
+          <p:cNvSpPr>
+            <a:spLocks noGrp="1"/>
+          </p:cNvSpPr>
+          <p:nvPr>
+            <p:ph type="title"/>
+          </p:nvPr>
+        </p:nvSpPr>
+        <p:spPr/>
+        <p:txBody>
+          <a:bodyPr/>
+          <a:lstStyle/>
+          <a:p>
+            <a:r>
+              <a:rPr lang="en-US" dirty="0"/>
+              <a:t>Sequenced Collection and </a:t>
+            </a:r>
+            <a:r>
+              <a:rPr lang="en-US" dirty="0" err="1"/>
+              <a:t>SequencedSet</a:t>
+            </a:r>
+            <a:endParaRPr lang="en-US" dirty="0"/>
+          </a:p>
+        </p:txBody>
+      </p:sp>
+      <p:pic>
+        <p:nvPicPr>
+          <p:cNvPr id="5" name="Content Placeholder 4">
+            <a:extLst>
+              <a:ext uri="{FF2B5EF4-FFF2-40B4-BE49-F238E27FC236}">
+                <a16:creationId xmlns:a16="http://schemas.microsoft.com/office/drawing/2014/main" id="{3D23EFC4-5F9C-0927-0493-84E91552680E}"/>
+              </a:ext>
+            </a:extLst>
+          </p:cNvPr>
+          <p:cNvPicPr>
+            <a:picLocks noGrp="1" noChangeAspect="1"/>
+          </p:cNvPicPr>
+          <p:nvPr>
+            <p:ph idx="1"/>
+          </p:nvPr>
+        </p:nvPicPr>
+        <p:blipFill>
+          <a:blip r:embed="rId2"/>
+          <a:stretch>
+            <a:fillRect/>
+          </a:stretch>
+        </p:blipFill>
+        <p:spPr>
+          <a:xfrm>
+            <a:off x="1801171" y="2193925"/>
+            <a:ext cx="8589658" cy="4024313"/>
+          </a:xfrm>
+        </p:spPr>
+      </p:pic>
+    </p:spTree>
+    <p:extLst>
+      <p:ext uri="{BB962C8B-B14F-4D97-AF65-F5344CB8AC3E}">
+        <p14:creationId xmlns:p14="http://schemas.microsoft.com/office/powerpoint/2010/main" val="1634663690"/>
+      </p:ext>
+    </p:extLst>
+  </p:cSld>
+  <p:clrMapOvr>
+    <a:masterClrMapping/>
+  </p:clrMapOvr>
+</p:sld>
+</file>
+
+<file path=ppt/slides/slide11.xml><?xml version="1.0" encoding="utf-8"?>
+<p:sld xmlns:a="http://schemas.openxmlformats.org/drawingml/2006/main" xmlns:r="http://schemas.openxmlformats.org/officeDocument/2006/relationships" xmlns:p="http://schemas.openxmlformats.org/presentationml/2006/main">
+  <p:cSld>
+    <p:spTree>
+      <p:nvGrpSpPr>
+        <p:cNvPr id="1" name="">
+          <a:extLst>
+            <a:ext uri="{FF2B5EF4-FFF2-40B4-BE49-F238E27FC236}">
+              <a16:creationId xmlns:a16="http://schemas.microsoft.com/office/drawing/2014/main" id="{C70A89B1-6003-AD7D-8A8E-6102BFA5EED5}"/>
+            </a:ext>
+          </a:extLst>
+        </p:cNvPr>
+        <p:cNvGrpSpPr/>
+        <p:nvPr/>
+      </p:nvGrpSpPr>
+      <p:grpSpPr>
+        <a:xfrm>
+          <a:off x="0" y="0"/>
+          <a:ext cx="0" cy="0"/>
+          <a:chOff x="0" y="0"/>
+          <a:chExt cx="0" cy="0"/>
+        </a:xfrm>
+      </p:grpSpPr>
+      <p:sp>
+        <p:nvSpPr>
+          <p:cNvPr id="2" name="Title 1">
+            <a:extLst>
+              <a:ext uri="{FF2B5EF4-FFF2-40B4-BE49-F238E27FC236}">
+                <a16:creationId xmlns:a16="http://schemas.microsoft.com/office/drawing/2014/main" id="{059D7554-68D7-4F9D-CFBA-C0927E1DEF8D}"/>
+              </a:ext>
+            </a:extLst>
+          </p:cNvPr>
+          <p:cNvSpPr>
+            <a:spLocks noGrp="1"/>
+          </p:cNvSpPr>
+          <p:nvPr>
+            <p:ph type="title"/>
+          </p:nvPr>
+        </p:nvSpPr>
+        <p:spPr/>
+        <p:txBody>
+          <a:bodyPr/>
+          <a:lstStyle/>
+          <a:p>
+            <a:r>
+              <a:rPr lang="en-US" dirty="0" err="1"/>
+              <a:t>SequencedMaps</a:t>
+            </a:r>
+            <a:endParaRPr lang="en-US" dirty="0"/>
+          </a:p>
+        </p:txBody>
+      </p:sp>
+      <p:pic>
+        <p:nvPicPr>
+          <p:cNvPr id="7" name="Content Placeholder 6">
+            <a:extLst>
+              <a:ext uri="{FF2B5EF4-FFF2-40B4-BE49-F238E27FC236}">
+                <a16:creationId xmlns:a16="http://schemas.microsoft.com/office/drawing/2014/main" id="{351DEA7C-5972-574A-1F30-96D59C77F0CD}"/>
+              </a:ext>
+            </a:extLst>
+          </p:cNvPr>
+          <p:cNvPicPr>
+            <a:picLocks noGrp="1" noChangeAspect="1"/>
+          </p:cNvPicPr>
+          <p:nvPr>
+            <p:ph idx="1"/>
+          </p:nvPr>
+        </p:nvPicPr>
+        <p:blipFill>
+          <a:blip r:embed="rId2"/>
+          <a:stretch>
+            <a:fillRect/>
+          </a:stretch>
+        </p:blipFill>
+        <p:spPr>
+          <a:xfrm>
+            <a:off x="2315796" y="2193925"/>
+            <a:ext cx="7560407" cy="4024313"/>
+          </a:xfrm>
+        </p:spPr>
+      </p:pic>
+    </p:spTree>
+    <p:extLst>
+      <p:ext uri="{BB962C8B-B14F-4D97-AF65-F5344CB8AC3E}">
+        <p14:creationId xmlns:p14="http://schemas.microsoft.com/office/powerpoint/2010/main" val="1394075550"/>
+      </p:ext>
+    </p:extLst>
+  </p:cSld>
+  <p:clrMapOvr>
+    <a:masterClrMapping/>
+  </p:clrMapOvr>
+</p:sld>
+</file>
+
+<file path=ppt/slides/slide12.xml><?xml version="1.0" encoding="utf-8"?>
+<p:sld xmlns:a="http://schemas.openxmlformats.org/drawingml/2006/main" xmlns:r="http://schemas.openxmlformats.org/officeDocument/2006/relationships" xmlns:p="http://schemas.openxmlformats.org/presentationml/2006/main">
+  <p:cSld>
+    <p:spTree>
+      <p:nvGrpSpPr>
         <p:cNvPr id="1" name="">
           <a:extLst>
             <a:ext uri="{FF2B5EF4-FFF2-40B4-BE49-F238E27FC236}">
@@ -7712,7 +7751,7 @@
         </p:nvSpPr>
         <p:spPr bwMode="auto">
           <a:xfrm>
-            <a:off x="685800" y="1944466"/>
+            <a:off x="5670754" y="1678995"/>
             <a:ext cx="6031716" cy="4524315"/>
           </a:xfrm>
           <a:prstGeom prst="rect">
@@ -8093,65 +8132,6 @@
           </a:p>
         </p:txBody>
       </p:sp>
-    </p:spTree>
-    <p:extLst>
-      <p:ext uri="{BB962C8B-B14F-4D97-AF65-F5344CB8AC3E}">
-        <p14:creationId xmlns:p14="http://schemas.microsoft.com/office/powerpoint/2010/main" val="277469124"/>
-      </p:ext>
-    </p:extLst>
-  </p:cSld>
-  <p:clrMapOvr>
-    <a:masterClrMapping/>
-  </p:clrMapOvr>
-</p:sld>
-</file>
-
-<file path=ppt/slides/slide11.xml><?xml version="1.0" encoding="utf-8"?>
-<p:sld xmlns:a="http://schemas.openxmlformats.org/drawingml/2006/main" xmlns:r="http://schemas.openxmlformats.org/officeDocument/2006/relationships" xmlns:p="http://schemas.openxmlformats.org/presentationml/2006/main">
-  <p:cSld>
-    <p:spTree>
-      <p:nvGrpSpPr>
-        <p:cNvPr id="1" name=""/>
-        <p:cNvGrpSpPr/>
-        <p:nvPr/>
-      </p:nvGrpSpPr>
-      <p:grpSpPr>
-        <a:xfrm>
-          <a:off x="0" y="0"/>
-          <a:ext cx="0" cy="0"/>
-          <a:chOff x="0" y="0"/>
-          <a:chExt cx="0" cy="0"/>
-        </a:xfrm>
-      </p:grpSpPr>
-      <p:sp>
-        <p:nvSpPr>
-          <p:cNvPr id="2" name="Title 1">
-            <a:extLst>
-              <a:ext uri="{FF2B5EF4-FFF2-40B4-BE49-F238E27FC236}">
-                <a16:creationId xmlns:a16="http://schemas.microsoft.com/office/drawing/2014/main" id="{50460DF2-9842-8517-A2EE-4314ACC25FF6}"/>
-              </a:ext>
-            </a:extLst>
-          </p:cNvPr>
-          <p:cNvSpPr>
-            <a:spLocks noGrp="1"/>
-          </p:cNvSpPr>
-          <p:nvPr>
-            <p:ph type="title"/>
-          </p:nvPr>
-        </p:nvSpPr>
-        <p:spPr/>
-        <p:txBody>
-          <a:bodyPr/>
-          <a:lstStyle/>
-          <a:p>
-            <a:r>
-              <a:rPr lang="en-US" dirty="0" err="1"/>
-              <a:t>TextBlocks</a:t>
-            </a:r>
-            <a:endParaRPr lang="en-US" dirty="0"/>
-          </a:p>
-        </p:txBody>
-      </p:sp>
       <p:sp>
         <p:nvSpPr>
           <p:cNvPr id="3" name="Content Placeholder 2">
@@ -8161,19 +8141,188 @@
               </a:ext>
             </a:extLst>
           </p:cNvPr>
-          <p:cNvSpPr>
-            <a:spLocks noGrp="1"/>
+          <p:cNvSpPr txBox="1">
+            <a:spLocks/>
           </p:cNvSpPr>
-          <p:nvPr>
-            <p:ph idx="1"/>
-          </p:nvPr>
+          <p:nvPr/>
         </p:nvSpPr>
-        <p:spPr/>
+        <p:spPr>
+          <a:xfrm>
+            <a:off x="410497" y="2285253"/>
+            <a:ext cx="6580238" cy="4024125"/>
+          </a:xfrm>
+          <a:prstGeom prst="rect">
+            <a:avLst/>
+          </a:prstGeom>
+        </p:spPr>
         <p:txBody>
-          <a:bodyPr>
+          <a:bodyPr vert="horz" lIns="91440" tIns="45720" rIns="91440" bIns="45720" rtlCol="0">
             <a:normAutofit/>
           </a:bodyPr>
-          <a:lstStyle/>
+          <a:lstStyle>
+            <a:lvl1pPr marL="228600" indent="-228600" algn="l" defTabSz="914400" rtl="0" eaLnBrk="1" latinLnBrk="0" hangingPunct="1">
+              <a:lnSpc>
+                <a:spcPct val="90000"/>
+              </a:lnSpc>
+              <a:spcBef>
+                <a:spcPts val="1000"/>
+              </a:spcBef>
+              <a:buFont typeface="Arial" panose="020B0604020202020204" pitchFamily="34" charset="0"/>
+              <a:buChar char="•"/>
+              <a:defRPr sz="2200" kern="1200">
+                <a:solidFill>
+                  <a:schemeClr val="tx1"/>
+                </a:solidFill>
+                <a:latin typeface="+mn-lt"/>
+                <a:ea typeface="+mn-ea"/>
+                <a:cs typeface="+mn-cs"/>
+              </a:defRPr>
+            </a:lvl1pPr>
+            <a:lvl2pPr marL="685800" indent="-228600" algn="l" defTabSz="914400" rtl="0" eaLnBrk="1" latinLnBrk="0" hangingPunct="1">
+              <a:lnSpc>
+                <a:spcPct val="90000"/>
+              </a:lnSpc>
+              <a:spcBef>
+                <a:spcPts val="500"/>
+              </a:spcBef>
+              <a:buFont typeface="Arial" panose="020B0604020202020204" pitchFamily="34" charset="0"/>
+              <a:buChar char="•"/>
+              <a:defRPr sz="2000" kern="1200">
+                <a:solidFill>
+                  <a:schemeClr val="tx1"/>
+                </a:solidFill>
+                <a:latin typeface="+mn-lt"/>
+                <a:ea typeface="+mn-ea"/>
+                <a:cs typeface="+mn-cs"/>
+              </a:defRPr>
+            </a:lvl2pPr>
+            <a:lvl3pPr marL="1143000" indent="-228600" algn="l" defTabSz="914400" rtl="0" eaLnBrk="1" latinLnBrk="0" hangingPunct="1">
+              <a:lnSpc>
+                <a:spcPct val="90000"/>
+              </a:lnSpc>
+              <a:spcBef>
+                <a:spcPts val="500"/>
+              </a:spcBef>
+              <a:buFont typeface="Arial" panose="020B0604020202020204" pitchFamily="34" charset="0"/>
+              <a:buChar char="•"/>
+              <a:defRPr sz="1800" kern="1200">
+                <a:solidFill>
+                  <a:schemeClr val="tx1"/>
+                </a:solidFill>
+                <a:latin typeface="+mn-lt"/>
+                <a:ea typeface="+mn-ea"/>
+                <a:cs typeface="+mn-cs"/>
+              </a:defRPr>
+            </a:lvl3pPr>
+            <a:lvl4pPr marL="1600200" indent="-228600" algn="l" defTabSz="914400" rtl="0" eaLnBrk="1" latinLnBrk="0" hangingPunct="1">
+              <a:lnSpc>
+                <a:spcPct val="90000"/>
+              </a:lnSpc>
+              <a:spcBef>
+                <a:spcPts val="500"/>
+              </a:spcBef>
+              <a:buFont typeface="Arial" panose="020B0604020202020204" pitchFamily="34" charset="0"/>
+              <a:buChar char="•"/>
+              <a:defRPr sz="1600" kern="1200">
+                <a:solidFill>
+                  <a:schemeClr val="tx1"/>
+                </a:solidFill>
+                <a:latin typeface="+mn-lt"/>
+                <a:ea typeface="+mn-ea"/>
+                <a:cs typeface="+mn-cs"/>
+              </a:defRPr>
+            </a:lvl4pPr>
+            <a:lvl5pPr marL="2057400" indent="-228600" algn="l" defTabSz="914400" rtl="0" eaLnBrk="1" latinLnBrk="0" hangingPunct="1">
+              <a:lnSpc>
+                <a:spcPct val="90000"/>
+              </a:lnSpc>
+              <a:spcBef>
+                <a:spcPts val="500"/>
+              </a:spcBef>
+              <a:buFont typeface="Arial" panose="020B0604020202020204" pitchFamily="34" charset="0"/>
+              <a:buChar char="•"/>
+              <a:defRPr sz="1600" kern="1200">
+                <a:solidFill>
+                  <a:schemeClr val="tx1"/>
+                </a:solidFill>
+                <a:latin typeface="+mn-lt"/>
+                <a:ea typeface="+mn-ea"/>
+                <a:cs typeface="+mn-cs"/>
+              </a:defRPr>
+            </a:lvl5pPr>
+            <a:lvl6pPr marL="2514600" indent="-228600" algn="l" defTabSz="914400" rtl="0" eaLnBrk="1" latinLnBrk="0" hangingPunct="1">
+              <a:lnSpc>
+                <a:spcPct val="90000"/>
+              </a:lnSpc>
+              <a:spcBef>
+                <a:spcPts val="500"/>
+              </a:spcBef>
+              <a:buFont typeface="Arial" panose="020B0604020202020204" pitchFamily="34" charset="0"/>
+              <a:buChar char="•"/>
+              <a:defRPr sz="1600" kern="1200">
+                <a:solidFill>
+                  <a:schemeClr val="tx1"/>
+                </a:solidFill>
+                <a:latin typeface="+mn-lt"/>
+                <a:ea typeface="+mn-ea"/>
+                <a:cs typeface="+mn-cs"/>
+              </a:defRPr>
+            </a:lvl6pPr>
+            <a:lvl7pPr marL="2971800" indent="-228600" algn="l" defTabSz="914400" rtl="0" eaLnBrk="1" latinLnBrk="0" hangingPunct="1">
+              <a:lnSpc>
+                <a:spcPct val="90000"/>
+              </a:lnSpc>
+              <a:spcBef>
+                <a:spcPts val="500"/>
+              </a:spcBef>
+              <a:buFont typeface="Arial" panose="020B0604020202020204" pitchFamily="34" charset="0"/>
+              <a:buChar char="•"/>
+              <a:defRPr sz="1600" kern="1200">
+                <a:solidFill>
+                  <a:schemeClr val="tx1"/>
+                </a:solidFill>
+                <a:latin typeface="+mn-lt"/>
+                <a:ea typeface="+mn-ea"/>
+                <a:cs typeface="+mn-cs"/>
+              </a:defRPr>
+            </a:lvl7pPr>
+            <a:lvl8pPr marL="3429000" indent="-228600" algn="l" defTabSz="914400" rtl="0" eaLnBrk="1" latinLnBrk="0" hangingPunct="1">
+              <a:lnSpc>
+                <a:spcPct val="90000"/>
+              </a:lnSpc>
+              <a:spcBef>
+                <a:spcPts val="500"/>
+              </a:spcBef>
+              <a:buFont typeface="Arial" panose="020B0604020202020204" pitchFamily="34" charset="0"/>
+              <a:buChar char="•"/>
+              <a:defRPr sz="1600" kern="1200">
+                <a:solidFill>
+                  <a:schemeClr val="tx1"/>
+                </a:solidFill>
+                <a:latin typeface="+mn-lt"/>
+                <a:ea typeface="+mn-ea"/>
+                <a:cs typeface="+mn-cs"/>
+              </a:defRPr>
+            </a:lvl8pPr>
+            <a:lvl9pPr marL="3886200" indent="-228600" algn="l" defTabSz="914400" rtl="0" eaLnBrk="1" latinLnBrk="0" hangingPunct="1">
+              <a:lnSpc>
+                <a:spcPct val="90000"/>
+              </a:lnSpc>
+              <a:spcBef>
+                <a:spcPts val="500"/>
+              </a:spcBef>
+              <a:buFont typeface="Arial" panose="020B0604020202020204" pitchFamily="34" charset="0"/>
+              <a:buChar char="•"/>
+              <a:defRPr sz="1600" kern="1200">
+                <a:solidFill>
+                  <a:schemeClr val="tx1"/>
+                </a:solidFill>
+                <a:latin typeface="+mn-lt"/>
+                <a:ea typeface="+mn-ea"/>
+                <a:cs typeface="+mn-cs"/>
+              </a:defRPr>
+            </a:lvl9pPr>
+          </a:lstStyle>
           <a:p>
             <a:r>
               <a:rPr lang="en-US" sz="2400" dirty="0">
@@ -8186,16 +8335,12 @@
               <a:t>Indents start from the first </a:t>
             </a:r>
             <a:r>
-              <a:rPr kumimoji="0" lang="en-US" altLang="en-US" sz="2400" b="0" i="0" u="none" strike="noStrike" cap="none" normalizeH="0" baseline="0" dirty="0">
-                <a:ln>
-                  <a:noFill/>
-                </a:ln>
+              <a:rPr lang="en-US" altLang="en-US" sz="2400" dirty="0">
                 <a:solidFill>
                   <a:schemeClr val="accent2">
                     <a:lumMod val="50000"/>
                   </a:schemeClr>
                 </a:solidFill>
-                <a:effectLst/>
                 <a:latin typeface="JetBrains Mono"/>
               </a:rPr>
               <a:t>" in """</a:t>
@@ -8227,16 +8372,12 @@
               <a:t>Terminating </a:t>
             </a:r>
             <a:r>
-              <a:rPr kumimoji="0" lang="en-US" altLang="en-US" sz="2400" b="0" i="0" u="none" strike="noStrike" cap="none" normalizeH="0" baseline="0" dirty="0">
-                <a:ln>
-                  <a:noFill/>
-                </a:ln>
+              <a:rPr lang="en-US" altLang="en-US" sz="2400" dirty="0">
                 <a:solidFill>
                   <a:schemeClr val="accent2">
                     <a:lumMod val="50000"/>
                   </a:schemeClr>
                 </a:solidFill>
-                <a:effectLst/>
                 <a:latin typeface="JetBrains Mono"/>
               </a:rPr>
               <a:t>""" can be on the same line as the last string line</a:t>
@@ -8278,99 +8419,10 @@
           </a:p>
         </p:txBody>
       </p:sp>
-      <p:sp>
-        <p:nvSpPr>
-          <p:cNvPr id="4" name="Rectangle 1">
-            <a:extLst>
-              <a:ext uri="{FF2B5EF4-FFF2-40B4-BE49-F238E27FC236}">
-                <a16:creationId xmlns:a16="http://schemas.microsoft.com/office/drawing/2014/main" id="{B4C7CD00-C345-91C1-64C3-3F8C017918C9}"/>
-              </a:ext>
-            </a:extLst>
-          </p:cNvPr>
-          <p:cNvSpPr>
-            <a:spLocks noChangeArrowheads="1"/>
-          </p:cNvSpPr>
-          <p:nvPr/>
-        </p:nvSpPr>
-        <p:spPr bwMode="auto">
-          <a:xfrm>
-            <a:off x="0" y="43934"/>
-            <a:ext cx="184731" cy="369332"/>
-          </a:xfrm>
-          <a:prstGeom prst="rect">
-            <a:avLst/>
-          </a:prstGeom>
-          <a:solidFill>
-            <a:srgbClr val="1E1F22"/>
-          </a:solidFill>
-          <a:ln>
-            <a:noFill/>
-          </a:ln>
-          <a:effectLst/>
-          <a:extLst>
-            <a:ext uri="{91240B29-F687-4F45-9708-019B960494DF}">
-              <a14:hiddenLine xmlns:a14="http://schemas.microsoft.com/office/drawing/2010/main" w="9525">
-                <a:solidFill>
-                  <a:schemeClr val="tx1"/>
-                </a:solidFill>
-                <a:miter lim="800000"/>
-                <a:headEnd/>
-                <a:tailEnd/>
-              </a14:hiddenLine>
-            </a:ext>
-            <a:ext uri="{AF507438-7753-43E0-B8FC-AC1667EBCBE1}">
-              <a14:hiddenEffects xmlns:a14="http://schemas.microsoft.com/office/drawing/2010/main">
-                <a:effectLst>
-                  <a:outerShdw dist="35921" dir="2700000" algn="ctr" rotWithShape="0">
-                    <a:schemeClr val="bg2"/>
-                  </a:outerShdw>
-                </a:effectLst>
-              </a14:hiddenEffects>
-            </a:ext>
-          </a:extLst>
-        </p:spPr>
-        <p:txBody>
-          <a:bodyPr vert="horz" wrap="none" lIns="91440" tIns="45720" rIns="91440" bIns="45720" numCol="1" anchor="ctr" anchorCtr="0" compatLnSpc="1">
-            <a:prstTxWarp prst="textNoShape">
-              <a:avLst/>
-            </a:prstTxWarp>
-            <a:spAutoFit/>
-          </a:bodyPr>
-          <a:lstStyle/>
-          <a:p>
-            <a:pPr marL="0" marR="0" lvl="0" indent="0" algn="l" defTabSz="914400" rtl="0" eaLnBrk="0" fontAlgn="base" latinLnBrk="0" hangingPunct="0">
-              <a:lnSpc>
-                <a:spcPct val="100000"/>
-              </a:lnSpc>
-              <a:spcBef>
-                <a:spcPct val="0"/>
-              </a:spcBef>
-              <a:spcAft>
-                <a:spcPct val="0"/>
-              </a:spcAft>
-              <a:buClrTx/>
-              <a:buSzTx/>
-              <a:buFontTx/>
-              <a:buNone/>
-              <a:tabLst/>
-            </a:pPr>
-            <a:endParaRPr kumimoji="0" lang="en-US" altLang="en-US" sz="1800" b="0" i="0" u="none" strike="noStrike" cap="none" normalizeH="0" baseline="0" dirty="0">
-              <a:ln>
-                <a:noFill/>
-              </a:ln>
-              <a:solidFill>
-                <a:schemeClr val="tx1"/>
-              </a:solidFill>
-              <a:effectLst/>
-              <a:latin typeface="Arial" panose="020B0604020202020204" pitchFamily="34" charset="0"/>
-            </a:endParaRPr>
-          </a:p>
-        </p:txBody>
-      </p:sp>
     </p:spTree>
     <p:extLst>
       <p:ext uri="{BB962C8B-B14F-4D97-AF65-F5344CB8AC3E}">
-        <p14:creationId xmlns:p14="http://schemas.microsoft.com/office/powerpoint/2010/main" val="3861153770"/>
+        <p14:creationId xmlns:p14="http://schemas.microsoft.com/office/powerpoint/2010/main" val="277469124"/>
       </p:ext>
     </p:extLst>
   </p:cSld>
@@ -8635,7 +8687,7 @@
 </p:sld>
 </file>
 
-<file path=ppt/slides/slide12.xml><?xml version="1.0" encoding="utf-8"?>
+<file path=ppt/slides/slide13.xml><?xml version="1.0" encoding="utf-8"?>
 <p:sld xmlns:a="http://schemas.openxmlformats.org/drawingml/2006/main" xmlns:r="http://schemas.openxmlformats.org/officeDocument/2006/relationships" xmlns:p="http://schemas.openxmlformats.org/presentationml/2006/main">
   <p:cSld>
     <p:spTree>
@@ -9554,7 +9606,94 @@
 </p:sld>
 </file>
 
-<file path=ppt/slides/slide13.xml><?xml version="1.0" encoding="utf-8"?>
+<file path=ppt/slides/slide14.xml><?xml version="1.0" encoding="utf-8"?>
+<p:sld xmlns:a="http://schemas.openxmlformats.org/drawingml/2006/main" xmlns:r="http://schemas.openxmlformats.org/officeDocument/2006/relationships" xmlns:p="http://schemas.openxmlformats.org/presentationml/2006/main">
+  <p:cSld>
+    <p:spTree>
+      <p:nvGrpSpPr>
+        <p:cNvPr id="1" name=""/>
+        <p:cNvGrpSpPr/>
+        <p:nvPr/>
+      </p:nvGrpSpPr>
+      <p:grpSpPr>
+        <a:xfrm>
+          <a:off x="0" y="0"/>
+          <a:ext cx="0" cy="0"/>
+          <a:chOff x="0" y="0"/>
+          <a:chExt cx="0" cy="0"/>
+        </a:xfrm>
+      </p:grpSpPr>
+      <p:sp>
+        <p:nvSpPr>
+          <p:cNvPr id="2" name="Title 1">
+            <a:extLst>
+              <a:ext uri="{FF2B5EF4-FFF2-40B4-BE49-F238E27FC236}">
+                <a16:creationId xmlns:a16="http://schemas.microsoft.com/office/drawing/2014/main" id="{7A197655-5F06-9DCE-BE14-2AD5BE91AEB8}"/>
+              </a:ext>
+            </a:extLst>
+          </p:cNvPr>
+          <p:cNvSpPr>
+            <a:spLocks noGrp="1"/>
+          </p:cNvSpPr>
+          <p:nvPr>
+            <p:ph type="title"/>
+          </p:nvPr>
+        </p:nvSpPr>
+        <p:spPr/>
+        <p:txBody>
+          <a:bodyPr/>
+          <a:lstStyle/>
+          <a:p>
+            <a:r>
+              <a:rPr lang="en-US" dirty="0"/>
+              <a:t>Local Variable Type Inference</a:t>
+            </a:r>
+          </a:p>
+        </p:txBody>
+      </p:sp>
+      <p:pic>
+        <p:nvPicPr>
+          <p:cNvPr id="5" name="Content Placeholder 4">
+            <a:extLst>
+              <a:ext uri="{FF2B5EF4-FFF2-40B4-BE49-F238E27FC236}">
+                <a16:creationId xmlns:a16="http://schemas.microsoft.com/office/drawing/2014/main" id="{6B778550-0899-05C2-D465-7CDE6550A360}"/>
+              </a:ext>
+            </a:extLst>
+          </p:cNvPr>
+          <p:cNvPicPr>
+            <a:picLocks noGrp="1" noChangeAspect="1"/>
+          </p:cNvPicPr>
+          <p:nvPr>
+            <p:ph idx="1"/>
+          </p:nvPr>
+        </p:nvPicPr>
+        <p:blipFill>
+          <a:blip r:embed="rId2"/>
+          <a:stretch>
+            <a:fillRect/>
+          </a:stretch>
+        </p:blipFill>
+        <p:spPr>
+          <a:xfrm>
+            <a:off x="1237572" y="2958132"/>
+            <a:ext cx="9716856" cy="2495898"/>
+          </a:xfrm>
+        </p:spPr>
+      </p:pic>
+    </p:spTree>
+    <p:extLst>
+      <p:ext uri="{BB962C8B-B14F-4D97-AF65-F5344CB8AC3E}">
+        <p14:creationId xmlns:p14="http://schemas.microsoft.com/office/powerpoint/2010/main" val="2918550227"/>
+      </p:ext>
+    </p:extLst>
+  </p:cSld>
+  <p:clrMapOvr>
+    <a:masterClrMapping/>
+  </p:clrMapOvr>
+</p:sld>
+</file>
+
+<file path=ppt/slides/slide15.xml><?xml version="1.0" encoding="utf-8"?>
 <p:sld xmlns:a="http://schemas.openxmlformats.org/drawingml/2006/main" xmlns:r="http://schemas.openxmlformats.org/officeDocument/2006/relationships" xmlns:p="http://schemas.openxmlformats.org/presentationml/2006/main" show="0">
   <p:cSld>
     <p:spTree>
@@ -9702,7 +9841,7 @@
 </p:sld>
 </file>
 
-<file path=ppt/slides/slide14.xml><?xml version="1.0" encoding="utf-8"?>
+<file path=ppt/slides/slide16.xml><?xml version="1.0" encoding="utf-8"?>
 <p:sld xmlns:a="http://schemas.openxmlformats.org/drawingml/2006/main" xmlns:r="http://schemas.openxmlformats.org/officeDocument/2006/relationships" xmlns:p="http://schemas.openxmlformats.org/presentationml/2006/main">
   <p:cSld>
     <p:spTree>
@@ -9791,7 +9930,7 @@
 </p:sld>
 </file>
 
-<file path=ppt/slides/slide15.xml><?xml version="1.0" encoding="utf-8"?>
+<file path=ppt/slides/slide17.xml><?xml version="1.0" encoding="utf-8"?>
 <p:sld xmlns:a="http://schemas.openxmlformats.org/drawingml/2006/main" xmlns:r="http://schemas.openxmlformats.org/officeDocument/2006/relationships" xmlns:p="http://schemas.openxmlformats.org/presentationml/2006/main">
   <p:cSld>
     <p:spTree>
@@ -10420,7 +10559,7 @@
 </p:sld>
 </file>
 
-<file path=ppt/slides/slide16.xml><?xml version="1.0" encoding="utf-8"?>
+<file path=ppt/slides/slide18.xml><?xml version="1.0" encoding="utf-8"?>
 <p:sld xmlns:a="http://schemas.openxmlformats.org/drawingml/2006/main" xmlns:r="http://schemas.openxmlformats.org/officeDocument/2006/relationships" xmlns:p="http://schemas.openxmlformats.org/presentationml/2006/main">
   <p:cSld>
     <p:spTree>
@@ -16025,7 +16164,7 @@
 </p:sld>
 </file>
 
-<file path=ppt/slides/slide17.xml><?xml version="1.0" encoding="utf-8"?>
+<file path=ppt/slides/slide19.xml><?xml version="1.0" encoding="utf-8"?>
 <p:sld xmlns:a="http://schemas.openxmlformats.org/drawingml/2006/main" xmlns:r="http://schemas.openxmlformats.org/officeDocument/2006/relationships" xmlns:p="http://schemas.openxmlformats.org/presentationml/2006/main">
   <p:cSld>
     <p:spTree>
@@ -16273,7 +16412,427 @@
 </p:sld>
 </file>
 
-<file path=ppt/slides/slide18.xml><?xml version="1.0" encoding="utf-8"?>
+<file path=ppt/slides/slide2.xml><?xml version="1.0" encoding="utf-8"?>
+<p:sld xmlns:a="http://schemas.openxmlformats.org/drawingml/2006/main" xmlns:r="http://schemas.openxmlformats.org/officeDocument/2006/relationships" xmlns:p="http://schemas.openxmlformats.org/presentationml/2006/main">
+  <p:cSld>
+    <p:spTree>
+      <p:nvGrpSpPr>
+        <p:cNvPr id="1" name="">
+          <a:extLst>
+            <a:ext uri="{FF2B5EF4-FFF2-40B4-BE49-F238E27FC236}">
+              <a16:creationId xmlns:a16="http://schemas.microsoft.com/office/drawing/2014/main" id="{111A4128-A5E3-9ECD-CAF7-DFD93CB89271}"/>
+            </a:ext>
+          </a:extLst>
+        </p:cNvPr>
+        <p:cNvGrpSpPr/>
+        <p:nvPr/>
+      </p:nvGrpSpPr>
+      <p:grpSpPr>
+        <a:xfrm>
+          <a:off x="0" y="0"/>
+          <a:ext cx="0" cy="0"/>
+          <a:chOff x="0" y="0"/>
+          <a:chExt cx="0" cy="0"/>
+        </a:xfrm>
+      </p:grpSpPr>
+      <p:sp>
+        <p:nvSpPr>
+          <p:cNvPr id="2" name="Title 1">
+            <a:extLst>
+              <a:ext uri="{FF2B5EF4-FFF2-40B4-BE49-F238E27FC236}">
+                <a16:creationId xmlns:a16="http://schemas.microsoft.com/office/drawing/2014/main" id="{867CE42F-DD6A-5DBE-54DA-F0DB08B248AC}"/>
+              </a:ext>
+            </a:extLst>
+          </p:cNvPr>
+          <p:cNvSpPr>
+            <a:spLocks noGrp="1"/>
+          </p:cNvSpPr>
+          <p:nvPr>
+            <p:ph type="title"/>
+          </p:nvPr>
+        </p:nvSpPr>
+        <p:spPr/>
+        <p:txBody>
+          <a:bodyPr/>
+          <a:lstStyle/>
+          <a:p>
+            <a:pPr algn="ctr"/>
+            <a:r>
+              <a:rPr lang="en-US" dirty="0"/>
+              <a:t>Main features</a:t>
+            </a:r>
+          </a:p>
+        </p:txBody>
+      </p:sp>
+      <p:sp>
+        <p:nvSpPr>
+          <p:cNvPr id="3" name="Content Placeholder 2">
+            <a:extLst>
+              <a:ext uri="{FF2B5EF4-FFF2-40B4-BE49-F238E27FC236}">
+                <a16:creationId xmlns:a16="http://schemas.microsoft.com/office/drawing/2014/main" id="{8BE640BE-0472-7163-29C4-D6E74E74C851}"/>
+              </a:ext>
+            </a:extLst>
+          </p:cNvPr>
+          <p:cNvSpPr>
+            <a:spLocks noGrp="1"/>
+          </p:cNvSpPr>
+          <p:nvPr>
+            <p:ph idx="1"/>
+          </p:nvPr>
+        </p:nvSpPr>
+        <p:spPr>
+          <a:xfrm>
+            <a:off x="685800" y="2194561"/>
+            <a:ext cx="10820400" cy="4206239"/>
+          </a:xfrm>
+        </p:spPr>
+        <p:txBody>
+          <a:bodyPr numCol="2">
+            <a:normAutofit/>
+          </a:bodyPr>
+          <a:lstStyle/>
+          <a:p>
+            <a:pPr marL="0" indent="0" algn="ctr">
+              <a:lnSpc>
+                <a:spcPct val="110000"/>
+              </a:lnSpc>
+              <a:spcBef>
+                <a:spcPts val="0"/>
+              </a:spcBef>
+              <a:buNone/>
+            </a:pPr>
+            <a:r>
+              <a:rPr lang="en-US" dirty="0"/>
+              <a:t>Java 17</a:t>
+            </a:r>
+          </a:p>
+          <a:p>
+            <a:pPr>
+              <a:lnSpc>
+                <a:spcPct val="110000"/>
+              </a:lnSpc>
+              <a:spcBef>
+                <a:spcPts val="0"/>
+              </a:spcBef>
+            </a:pPr>
+            <a:r>
+              <a:rPr lang="en-US" dirty="0"/>
+              <a:t>Record Classes</a:t>
+            </a:r>
+          </a:p>
+          <a:p>
+            <a:pPr>
+              <a:lnSpc>
+                <a:spcPct val="110000"/>
+              </a:lnSpc>
+              <a:spcBef>
+                <a:spcPts val="0"/>
+              </a:spcBef>
+            </a:pPr>
+            <a:r>
+              <a:rPr lang="en-US" dirty="0"/>
+              <a:t>Sealed Classes</a:t>
+            </a:r>
+          </a:p>
+          <a:p>
+            <a:pPr>
+              <a:lnSpc>
+                <a:spcPct val="110000"/>
+              </a:lnSpc>
+              <a:spcBef>
+                <a:spcPts val="0"/>
+              </a:spcBef>
+            </a:pPr>
+            <a:r>
+              <a:rPr lang="en-US" dirty="0"/>
+              <a:t>Pattern Matching</a:t>
+            </a:r>
+          </a:p>
+          <a:p>
+            <a:pPr>
+              <a:lnSpc>
+                <a:spcPct val="110000"/>
+              </a:lnSpc>
+              <a:spcBef>
+                <a:spcPts val="0"/>
+              </a:spcBef>
+            </a:pPr>
+            <a:r>
+              <a:rPr lang="en-US" dirty="0"/>
+              <a:t>Enhanced Switch Statements</a:t>
+            </a:r>
+          </a:p>
+          <a:p>
+            <a:pPr>
+              <a:lnSpc>
+                <a:spcPct val="110000"/>
+              </a:lnSpc>
+              <a:spcBef>
+                <a:spcPts val="0"/>
+              </a:spcBef>
+            </a:pPr>
+            <a:r>
+              <a:rPr lang="en-US" dirty="0"/>
+              <a:t>Switch Expressions</a:t>
+            </a:r>
+          </a:p>
+          <a:p>
+            <a:pPr>
+              <a:lnSpc>
+                <a:spcPct val="110000"/>
+              </a:lnSpc>
+              <a:spcBef>
+                <a:spcPts val="0"/>
+              </a:spcBef>
+            </a:pPr>
+            <a:r>
+              <a:rPr lang="en-US" dirty="0"/>
+              <a:t>Snippets in </a:t>
+            </a:r>
+            <a:r>
+              <a:rPr lang="en-US" dirty="0" err="1"/>
+              <a:t>JavaDoc</a:t>
+            </a:r>
+            <a:endParaRPr lang="en-US" dirty="0"/>
+          </a:p>
+          <a:p>
+            <a:pPr>
+              <a:lnSpc>
+                <a:spcPct val="110000"/>
+              </a:lnSpc>
+              <a:spcBef>
+                <a:spcPts val="0"/>
+              </a:spcBef>
+            </a:pPr>
+            <a:r>
+              <a:rPr lang="en-US" dirty="0"/>
+              <a:t>Local Variable Type Inference</a:t>
+            </a:r>
+          </a:p>
+          <a:p>
+            <a:pPr>
+              <a:lnSpc>
+                <a:spcPct val="110000"/>
+              </a:lnSpc>
+              <a:spcBef>
+                <a:spcPts val="0"/>
+              </a:spcBef>
+            </a:pPr>
+            <a:endParaRPr lang="en-US" dirty="0">
+              <a:latin typeface="Nunito" panose="020F0502020204030204" pitchFamily="2" charset="0"/>
+            </a:endParaRPr>
+          </a:p>
+          <a:p>
+            <a:pPr>
+              <a:lnSpc>
+                <a:spcPct val="110000"/>
+              </a:lnSpc>
+              <a:spcBef>
+                <a:spcPts val="0"/>
+              </a:spcBef>
+            </a:pPr>
+            <a:endParaRPr lang="en-US" dirty="0">
+              <a:latin typeface="Nunito" panose="020F0502020204030204" pitchFamily="2" charset="0"/>
+            </a:endParaRPr>
+          </a:p>
+          <a:p>
+            <a:pPr>
+              <a:lnSpc>
+                <a:spcPct val="110000"/>
+              </a:lnSpc>
+              <a:spcBef>
+                <a:spcPts val="0"/>
+              </a:spcBef>
+            </a:pPr>
+            <a:endParaRPr lang="en-US" dirty="0">
+              <a:latin typeface="Nunito" panose="020F0502020204030204" pitchFamily="2" charset="0"/>
+            </a:endParaRPr>
+          </a:p>
+          <a:p>
+            <a:pPr marL="0" indent="0" algn="ctr">
+              <a:lnSpc>
+                <a:spcPct val="110000"/>
+              </a:lnSpc>
+              <a:spcBef>
+                <a:spcPts val="0"/>
+              </a:spcBef>
+              <a:buNone/>
+            </a:pPr>
+            <a:r>
+              <a:rPr lang="en-US" dirty="0">
+                <a:latin typeface="Nunito" panose="020F0502020204030204" pitchFamily="2" charset="0"/>
+              </a:rPr>
+              <a:t>Java 21</a:t>
+            </a:r>
+          </a:p>
+          <a:p>
+            <a:pPr algn="l" fontAlgn="base">
+              <a:lnSpc>
+                <a:spcPct val="110000"/>
+              </a:lnSpc>
+              <a:spcBef>
+                <a:spcPts val="0"/>
+              </a:spcBef>
+            </a:pPr>
+            <a:r>
+              <a:rPr lang="en-US" b="0" dirty="0">
+                <a:effectLst/>
+                <a:latin typeface="Nunito" panose="020F0502020204030204" pitchFamily="2" charset="0"/>
+              </a:rPr>
+              <a:t>Sequenced Collections and Maps</a:t>
+            </a:r>
+          </a:p>
+          <a:p>
+            <a:pPr algn="l" fontAlgn="base">
+              <a:lnSpc>
+                <a:spcPct val="110000"/>
+              </a:lnSpc>
+              <a:spcBef>
+                <a:spcPts val="0"/>
+              </a:spcBef>
+            </a:pPr>
+            <a:r>
+              <a:rPr lang="en-US" b="0" dirty="0">
+                <a:effectLst/>
+                <a:latin typeface="Nunito" panose="020F0502020204030204" pitchFamily="2" charset="0"/>
+              </a:rPr>
+              <a:t>Pattern Matching for Switch</a:t>
+            </a:r>
+          </a:p>
+          <a:p>
+            <a:pPr algn="l" fontAlgn="base">
+              <a:lnSpc>
+                <a:spcPct val="110000"/>
+              </a:lnSpc>
+              <a:spcBef>
+                <a:spcPts val="0"/>
+              </a:spcBef>
+            </a:pPr>
+            <a:r>
+              <a:rPr lang="en-US" dirty="0">
+                <a:latin typeface="Nunito" panose="020F0502020204030204" pitchFamily="2" charset="0"/>
+              </a:rPr>
+              <a:t>Unnamed variables</a:t>
+            </a:r>
+            <a:endParaRPr lang="en-US" b="0" dirty="0">
+              <a:effectLst/>
+              <a:latin typeface="Nunito" panose="020F0502020204030204" pitchFamily="2" charset="0"/>
+            </a:endParaRPr>
+          </a:p>
+          <a:p>
+            <a:pPr algn="l" fontAlgn="base">
+              <a:lnSpc>
+                <a:spcPct val="110000"/>
+              </a:lnSpc>
+              <a:spcBef>
+                <a:spcPts val="0"/>
+              </a:spcBef>
+            </a:pPr>
+            <a:r>
+              <a:rPr lang="en-US" b="0" dirty="0">
+                <a:effectLst/>
+                <a:latin typeface="Nunito" panose="020F0502020204030204" pitchFamily="2" charset="0"/>
+              </a:rPr>
+              <a:t>Virtual Threads</a:t>
+            </a:r>
+          </a:p>
+          <a:p>
+            <a:pPr>
+              <a:lnSpc>
+                <a:spcPct val="110000"/>
+              </a:lnSpc>
+              <a:spcBef>
+                <a:spcPts val="0"/>
+              </a:spcBef>
+            </a:pPr>
+            <a:r>
+              <a:rPr lang="en-US" dirty="0"/>
+              <a:t>Preview Features</a:t>
+            </a:r>
+          </a:p>
+          <a:p>
+            <a:pPr lvl="1">
+              <a:lnSpc>
+                <a:spcPct val="110000"/>
+              </a:lnSpc>
+              <a:spcBef>
+                <a:spcPts val="0"/>
+              </a:spcBef>
+            </a:pPr>
+            <a:r>
+              <a:rPr lang="en-US" dirty="0"/>
+              <a:t>Unnamed classes</a:t>
+            </a:r>
+          </a:p>
+          <a:p>
+            <a:pPr lvl="1">
+              <a:lnSpc>
+                <a:spcPct val="110000"/>
+              </a:lnSpc>
+              <a:spcBef>
+                <a:spcPts val="0"/>
+              </a:spcBef>
+            </a:pPr>
+            <a:r>
+              <a:rPr lang="en-US" dirty="0"/>
+              <a:t>Unnamed variables</a:t>
+            </a:r>
+          </a:p>
+          <a:p>
+            <a:pPr lvl="1">
+              <a:lnSpc>
+                <a:spcPct val="110000"/>
+              </a:lnSpc>
+              <a:spcBef>
+                <a:spcPts val="0"/>
+              </a:spcBef>
+            </a:pPr>
+            <a:r>
+              <a:rPr lang="en-US" dirty="0"/>
+              <a:t>String Templates</a:t>
+            </a:r>
+          </a:p>
+          <a:p>
+            <a:pPr algn="l" fontAlgn="base">
+              <a:lnSpc>
+                <a:spcPct val="110000"/>
+              </a:lnSpc>
+              <a:spcBef>
+                <a:spcPts val="0"/>
+              </a:spcBef>
+            </a:pPr>
+            <a:endParaRPr lang="en-US" b="0" dirty="0">
+              <a:effectLst/>
+              <a:latin typeface="Nunito" panose="020F0502020204030204" pitchFamily="2" charset="0"/>
+            </a:endParaRPr>
+          </a:p>
+          <a:p>
+            <a:pPr>
+              <a:lnSpc>
+                <a:spcPct val="110000"/>
+              </a:lnSpc>
+              <a:spcBef>
+                <a:spcPts val="0"/>
+              </a:spcBef>
+            </a:pPr>
+            <a:endParaRPr lang="en-US" dirty="0"/>
+          </a:p>
+        </p:txBody>
+      </p:sp>
+    </p:spTree>
+    <p:extLst>
+      <p:ext uri="{BB962C8B-B14F-4D97-AF65-F5344CB8AC3E}">
+        <p14:creationId xmlns:p14="http://schemas.microsoft.com/office/powerpoint/2010/main" val="2581397239"/>
+      </p:ext>
+    </p:extLst>
+  </p:cSld>
+  <p:clrMapOvr>
+    <a:masterClrMapping/>
+  </p:clrMapOvr>
+</p:sld>
+</file>
+
+<file path=ppt/slides/slide20.xml><?xml version="1.0" encoding="utf-8"?>
 <p:sld xmlns:a="http://schemas.openxmlformats.org/drawingml/2006/main" xmlns:r="http://schemas.openxmlformats.org/officeDocument/2006/relationships" xmlns:p="http://schemas.openxmlformats.org/presentationml/2006/main">
   <p:cSld>
     <p:spTree>
@@ -17956,7 +18515,7 @@
 </p:sld>
 </file>
 
-<file path=ppt/slides/slide19.xml><?xml version="1.0" encoding="utf-8"?>
+<file path=ppt/slides/slide21.xml><?xml version="1.0" encoding="utf-8"?>
 <p:sld xmlns:a="http://schemas.openxmlformats.org/drawingml/2006/main" xmlns:r="http://schemas.openxmlformats.org/officeDocument/2006/relationships" xmlns:p="http://schemas.openxmlformats.org/presentationml/2006/main">
   <p:cSld>
     <p:spTree>
@@ -18280,271 +18839,7 @@
 </p:sld>
 </file>
 
-<file path=ppt/slides/slide2.xml><?xml version="1.0" encoding="utf-8"?>
-<p:sld xmlns:a="http://schemas.openxmlformats.org/drawingml/2006/main" xmlns:r="http://schemas.openxmlformats.org/officeDocument/2006/relationships" xmlns:p="http://schemas.openxmlformats.org/presentationml/2006/main">
-  <p:cSld>
-    <p:spTree>
-      <p:nvGrpSpPr>
-        <p:cNvPr id="1" name="">
-          <a:extLst>
-            <a:ext uri="{FF2B5EF4-FFF2-40B4-BE49-F238E27FC236}">
-              <a16:creationId xmlns:a16="http://schemas.microsoft.com/office/drawing/2014/main" id="{111A4128-A5E3-9ECD-CAF7-DFD93CB89271}"/>
-            </a:ext>
-          </a:extLst>
-        </p:cNvPr>
-        <p:cNvGrpSpPr/>
-        <p:nvPr/>
-      </p:nvGrpSpPr>
-      <p:grpSpPr>
-        <a:xfrm>
-          <a:off x="0" y="0"/>
-          <a:ext cx="0" cy="0"/>
-          <a:chOff x="0" y="0"/>
-          <a:chExt cx="0" cy="0"/>
-        </a:xfrm>
-      </p:grpSpPr>
-      <p:sp>
-        <p:nvSpPr>
-          <p:cNvPr id="2" name="Title 1">
-            <a:extLst>
-              <a:ext uri="{FF2B5EF4-FFF2-40B4-BE49-F238E27FC236}">
-                <a16:creationId xmlns:a16="http://schemas.microsoft.com/office/drawing/2014/main" id="{867CE42F-DD6A-5DBE-54DA-F0DB08B248AC}"/>
-              </a:ext>
-            </a:extLst>
-          </p:cNvPr>
-          <p:cNvSpPr>
-            <a:spLocks noGrp="1"/>
-          </p:cNvSpPr>
-          <p:nvPr>
-            <p:ph type="title"/>
-          </p:nvPr>
-        </p:nvSpPr>
-        <p:spPr/>
-        <p:txBody>
-          <a:bodyPr/>
-          <a:lstStyle/>
-          <a:p>
-            <a:pPr algn="ctr"/>
-            <a:r>
-              <a:rPr lang="en-US" dirty="0"/>
-              <a:t>Main features</a:t>
-            </a:r>
-          </a:p>
-        </p:txBody>
-      </p:sp>
-      <p:sp>
-        <p:nvSpPr>
-          <p:cNvPr id="3" name="Content Placeholder 2">
-            <a:extLst>
-              <a:ext uri="{FF2B5EF4-FFF2-40B4-BE49-F238E27FC236}">
-                <a16:creationId xmlns:a16="http://schemas.microsoft.com/office/drawing/2014/main" id="{8BE640BE-0472-7163-29C4-D6E74E74C851}"/>
-              </a:ext>
-            </a:extLst>
-          </p:cNvPr>
-          <p:cNvSpPr>
-            <a:spLocks noGrp="1"/>
-          </p:cNvSpPr>
-          <p:nvPr>
-            <p:ph idx="1"/>
-          </p:nvPr>
-        </p:nvSpPr>
-        <p:spPr>
-          <a:xfrm>
-            <a:off x="685800" y="2194561"/>
-            <a:ext cx="10820400" cy="4206239"/>
-          </a:xfrm>
-        </p:spPr>
-        <p:txBody>
-          <a:bodyPr numCol="2">
-            <a:normAutofit fontScale="92500" lnSpcReduction="10000"/>
-          </a:bodyPr>
-          <a:lstStyle/>
-          <a:p>
-            <a:pPr marL="0" indent="0" algn="ctr">
-              <a:buNone/>
-            </a:pPr>
-            <a:r>
-              <a:rPr lang="en-US" dirty="0"/>
-              <a:t>Java 17</a:t>
-            </a:r>
-          </a:p>
-          <a:p>
-            <a:r>
-              <a:rPr lang="en-US" dirty="0"/>
-              <a:t>Record Classes</a:t>
-            </a:r>
-          </a:p>
-          <a:p>
-            <a:r>
-              <a:rPr lang="en-US" dirty="0"/>
-              <a:t>Sealed Classes</a:t>
-            </a:r>
-          </a:p>
-          <a:p>
-            <a:r>
-              <a:rPr lang="en-US" dirty="0"/>
-              <a:t>Pattern Matching</a:t>
-            </a:r>
-          </a:p>
-          <a:p>
-            <a:r>
-              <a:rPr lang="en-US" dirty="0"/>
-              <a:t>Enhanced Switch Statements</a:t>
-            </a:r>
-          </a:p>
-          <a:p>
-            <a:r>
-              <a:rPr lang="en-US" dirty="0"/>
-              <a:t>Switch Expressions</a:t>
-            </a:r>
-          </a:p>
-          <a:p>
-            <a:r>
-              <a:rPr lang="en-US" dirty="0"/>
-              <a:t>Snippets in </a:t>
-            </a:r>
-            <a:r>
-              <a:rPr lang="en-US" dirty="0" err="1"/>
-              <a:t>JavaDoc</a:t>
-            </a:r>
-            <a:endParaRPr lang="en-US" dirty="0"/>
-          </a:p>
-          <a:p>
-            <a:endParaRPr lang="en-US" dirty="0">
-              <a:latin typeface="Nunito" panose="020F0502020204030204" pitchFamily="2" charset="0"/>
-            </a:endParaRPr>
-          </a:p>
-          <a:p>
-            <a:endParaRPr lang="en-US" dirty="0">
-              <a:latin typeface="Nunito" panose="020F0502020204030204" pitchFamily="2" charset="0"/>
-            </a:endParaRPr>
-          </a:p>
-          <a:p>
-            <a:endParaRPr lang="en-US" dirty="0">
-              <a:latin typeface="Nunito" panose="020F0502020204030204" pitchFamily="2" charset="0"/>
-            </a:endParaRPr>
-          </a:p>
-          <a:p>
-            <a:pPr marL="0" indent="0" algn="ctr">
-              <a:buNone/>
-            </a:pPr>
-            <a:endParaRPr lang="en-US" dirty="0">
-              <a:latin typeface="Nunito" panose="020F0502020204030204" pitchFamily="2" charset="0"/>
-            </a:endParaRPr>
-          </a:p>
-          <a:p>
-            <a:pPr marL="0" indent="0" algn="ctr">
-              <a:buNone/>
-            </a:pPr>
-            <a:r>
-              <a:rPr lang="en-US" dirty="0">
-                <a:latin typeface="Nunito" panose="020F0502020204030204" pitchFamily="2" charset="0"/>
-              </a:rPr>
-              <a:t>Java 21</a:t>
-            </a:r>
-          </a:p>
-          <a:p>
-            <a:pPr algn="l" fontAlgn="base">
-              <a:spcAft>
-                <a:spcPts val="750"/>
-              </a:spcAft>
-            </a:pPr>
-            <a:r>
-              <a:rPr lang="en-US" b="0" dirty="0">
-                <a:effectLst/>
-                <a:latin typeface="Nunito" panose="020F0502020204030204" pitchFamily="2" charset="0"/>
-              </a:rPr>
-              <a:t>Pattern Matching for Switch</a:t>
-            </a:r>
-          </a:p>
-          <a:p>
-            <a:pPr algn="l" fontAlgn="base">
-              <a:spcAft>
-                <a:spcPts val="750"/>
-              </a:spcAft>
-            </a:pPr>
-            <a:r>
-              <a:rPr lang="en-US" dirty="0">
-                <a:latin typeface="Nunito" panose="020F0502020204030204" pitchFamily="2" charset="0"/>
-              </a:rPr>
-              <a:t>Unnamed variables</a:t>
-            </a:r>
-            <a:endParaRPr lang="en-US" b="0" dirty="0">
-              <a:effectLst/>
-              <a:latin typeface="Nunito" panose="020F0502020204030204" pitchFamily="2" charset="0"/>
-            </a:endParaRPr>
-          </a:p>
-          <a:p>
-            <a:pPr algn="l" fontAlgn="base">
-              <a:spcAft>
-                <a:spcPts val="750"/>
-              </a:spcAft>
-            </a:pPr>
-            <a:r>
-              <a:rPr lang="en-US" b="0" dirty="0">
-                <a:effectLst/>
-                <a:latin typeface="Nunito" panose="020F0502020204030204" pitchFamily="2" charset="0"/>
-              </a:rPr>
-              <a:t>Virtual Threads</a:t>
-            </a:r>
-          </a:p>
-          <a:p>
-            <a:r>
-              <a:rPr lang="en-US" dirty="0"/>
-              <a:t>Preview Features</a:t>
-            </a:r>
-          </a:p>
-          <a:p>
-            <a:pPr lvl="1"/>
-            <a:r>
-              <a:rPr lang="en-US" dirty="0"/>
-              <a:t>Unnamed classes</a:t>
-            </a:r>
-          </a:p>
-          <a:p>
-            <a:pPr lvl="1"/>
-            <a:r>
-              <a:rPr lang="en-US" dirty="0"/>
-              <a:t>Unnamed variables</a:t>
-            </a:r>
-          </a:p>
-          <a:p>
-            <a:pPr lvl="1"/>
-            <a:r>
-              <a:rPr lang="en-US" dirty="0"/>
-              <a:t>String Templates</a:t>
-            </a:r>
-          </a:p>
-          <a:p>
-            <a:pPr algn="l" fontAlgn="base">
-              <a:spcAft>
-                <a:spcPts val="750"/>
-              </a:spcAft>
-            </a:pPr>
-            <a:endParaRPr lang="en-US" b="0" dirty="0">
-              <a:effectLst/>
-              <a:latin typeface="Nunito" panose="020F0502020204030204" pitchFamily="2" charset="0"/>
-            </a:endParaRPr>
-          </a:p>
-          <a:p>
-            <a:endParaRPr lang="en-US" dirty="0"/>
-          </a:p>
-        </p:txBody>
-      </p:sp>
-    </p:spTree>
-    <p:extLst>
-      <p:ext uri="{BB962C8B-B14F-4D97-AF65-F5344CB8AC3E}">
-        <p14:creationId xmlns:p14="http://schemas.microsoft.com/office/powerpoint/2010/main" val="2581397239"/>
-      </p:ext>
-    </p:extLst>
-  </p:cSld>
-  <p:clrMapOvr>
-    <a:masterClrMapping/>
-  </p:clrMapOvr>
-</p:sld>
-</file>
-
-<file path=ppt/slides/slide20.xml><?xml version="1.0" encoding="utf-8"?>
+<file path=ppt/slides/slide22.xml><?xml version="1.0" encoding="utf-8"?>
 <p:sld xmlns:a="http://schemas.openxmlformats.org/drawingml/2006/main" xmlns:r="http://schemas.openxmlformats.org/officeDocument/2006/relationships" xmlns:p="http://schemas.openxmlformats.org/presentationml/2006/main">
   <p:cSld>
     <p:spTree>
@@ -19848,7 +20143,7 @@
 </p:sld>
 </file>
 
-<file path=ppt/slides/slide21.xml><?xml version="1.0" encoding="utf-8"?>
+<file path=ppt/slides/slide23.xml><?xml version="1.0" encoding="utf-8"?>
 <p:sld xmlns:a="http://schemas.openxmlformats.org/drawingml/2006/main" xmlns:r="http://schemas.openxmlformats.org/officeDocument/2006/relationships" xmlns:p="http://schemas.openxmlformats.org/presentationml/2006/main">
   <p:cSld>
     <p:spTree>
@@ -20073,6 +20368,116 @@
     <p:extLst>
       <p:ext uri="{BB962C8B-B14F-4D97-AF65-F5344CB8AC3E}">
         <p14:creationId xmlns:p14="http://schemas.microsoft.com/office/powerpoint/2010/main" val="78399007"/>
+      </p:ext>
+    </p:extLst>
+  </p:cSld>
+  <p:clrMapOvr>
+    <a:masterClrMapping/>
+  </p:clrMapOvr>
+</p:sld>
+</file>
+
+<file path=ppt/slides/slide24.xml><?xml version="1.0" encoding="utf-8"?>
+<p:sld xmlns:a="http://schemas.openxmlformats.org/drawingml/2006/main" xmlns:r="http://schemas.openxmlformats.org/officeDocument/2006/relationships" xmlns:p="http://schemas.openxmlformats.org/presentationml/2006/main">
+  <p:cSld>
+    <p:spTree>
+      <p:nvGrpSpPr>
+        <p:cNvPr id="1" name=""/>
+        <p:cNvGrpSpPr/>
+        <p:nvPr/>
+      </p:nvGrpSpPr>
+      <p:grpSpPr>
+        <a:xfrm>
+          <a:off x="0" y="0"/>
+          <a:ext cx="0" cy="0"/>
+          <a:chOff x="0" y="0"/>
+          <a:chExt cx="0" cy="0"/>
+        </a:xfrm>
+      </p:grpSpPr>
+      <p:sp>
+        <p:nvSpPr>
+          <p:cNvPr id="2" name="Title 1">
+            <a:extLst>
+              <a:ext uri="{FF2B5EF4-FFF2-40B4-BE49-F238E27FC236}">
+                <a16:creationId xmlns:a16="http://schemas.microsoft.com/office/drawing/2014/main" id="{3E120A75-6837-4ABA-7018-0B1ADA389CE3}"/>
+              </a:ext>
+            </a:extLst>
+          </p:cNvPr>
+          <p:cNvSpPr>
+            <a:spLocks noGrp="1"/>
+          </p:cNvSpPr>
+          <p:nvPr>
+            <p:ph type="title"/>
+          </p:nvPr>
+        </p:nvSpPr>
+        <p:spPr/>
+        <p:txBody>
+          <a:bodyPr/>
+          <a:lstStyle/>
+          <a:p>
+            <a:endParaRPr lang="en-US"/>
+          </a:p>
+        </p:txBody>
+      </p:sp>
+      <p:sp>
+        <p:nvSpPr>
+          <p:cNvPr id="3" name="Content Placeholder 2">
+            <a:extLst>
+              <a:ext uri="{FF2B5EF4-FFF2-40B4-BE49-F238E27FC236}">
+                <a16:creationId xmlns:a16="http://schemas.microsoft.com/office/drawing/2014/main" id="{042EB276-69F9-84F8-0DEB-2C62BE2DEB2D}"/>
+              </a:ext>
+            </a:extLst>
+          </p:cNvPr>
+          <p:cNvSpPr>
+            <a:spLocks noGrp="1"/>
+          </p:cNvSpPr>
+          <p:nvPr>
+            <p:ph idx="1"/>
+          </p:nvPr>
+        </p:nvSpPr>
+        <p:spPr/>
+        <p:txBody>
+          <a:bodyPr/>
+          <a:lstStyle/>
+          <a:p>
+            <a:endParaRPr lang="en-US"/>
+          </a:p>
+        </p:txBody>
+      </p:sp>
+      <p:pic>
+        <p:nvPicPr>
+          <p:cNvPr id="5" name="Picture 4">
+            <a:extLst>
+              <a:ext uri="{FF2B5EF4-FFF2-40B4-BE49-F238E27FC236}">
+                <a16:creationId xmlns:a16="http://schemas.microsoft.com/office/drawing/2014/main" id="{DB3A3865-446E-A19C-F19A-E2617ADE8387}"/>
+              </a:ext>
+            </a:extLst>
+          </p:cNvPr>
+          <p:cNvPicPr>
+            <a:picLocks noChangeAspect="1"/>
+          </p:cNvPicPr>
+          <p:nvPr/>
+        </p:nvPicPr>
+        <p:blipFill>
+          <a:blip r:embed="rId2"/>
+          <a:stretch>
+            <a:fillRect/>
+          </a:stretch>
+        </p:blipFill>
+        <p:spPr>
+          <a:xfrm>
+            <a:off x="0" y="8001"/>
+            <a:ext cx="12192000" cy="6841998"/>
+          </a:xfrm>
+          <a:prstGeom prst="rect">
+            <a:avLst/>
+          </a:prstGeom>
+        </p:spPr>
+      </p:pic>
+    </p:spTree>
+    <p:extLst>
+      <p:ext uri="{BB962C8B-B14F-4D97-AF65-F5344CB8AC3E}">
+        <p14:creationId xmlns:p14="http://schemas.microsoft.com/office/powerpoint/2010/main" val="1565946219"/>
       </p:ext>
     </p:extLst>
   </p:cSld>
